--- a/thinqreal/fieldcheck/FieldCheck_운영보고_20260807.pptx
+++ b/thinqreal/fieldcheck/FieldCheck_운영보고_20260807.pptx
@@ -786,7 +786,7 @@
           <a:p>
             <a:r>
               <a:rPr lang="en-US" dirty="0"/>
-              <a:t>판정 기준은 |Δ|≥0.15 하나입니다. 채광은 느리고 가전은 빠르다는 시간 구조가 이 기준의 근거입니다.</a:t>
+              <a:t>판정 기준은 |Δ|≥0.15의 3초 지속 하나입니다. 복합 명령의 상쇄 실측이 "끝값이 아니라 구간 전체"의 근거입니다.</a:t>
             </a:r>
             <a:endParaRPr lang="en-US" dirty="0"/>
           </a:p>
@@ -874,7 +874,7 @@
           <a:p>
             <a:r>
               <a:rPr lang="en-US" dirty="0"/>
-              <a:t>되물음 대응과 증거 보존이 L3의 두 설계 포인트입니다.</a:t>
+              <a:t>되물음 대응과 증거 보존이 L3의 두 설계 포인트입니다. "소리 내지 않는 구간은 전부 녹음"이 관측 사각을 없앱니다.</a:t>
             </a:r>
             <a:endParaRPr lang="en-US" dirty="0"/>
           </a:p>
@@ -4380,7 +4380,7 @@
                 <a:ea typeface="맑은 고딕" pitchFamily="34" charset="-122"/>
                 <a:cs typeface="맑은 고딕" pitchFamily="34" charset="-120"/>
               </a:rPr>
-              <a:t>실측 계산 예 — 이 숫자로 판정합니다 (현장 측정값)</a:t>
+              <a:t>실측 계산 예 — 단독 조명 (현장 측정값)</a:t>
             </a:r>
             <a:endParaRPr lang="en-US" sz="1350" dirty="0"/>
           </a:p>
@@ -4728,7 +4728,7 @@
                 <a:ea typeface="맑은 고딕" pitchFamily="34" charset="-122"/>
                 <a:cs typeface="맑은 고딕" pitchFamily="34" charset="-120"/>
               </a:rPr>
-              <a:t>L3 판정 기준 — '명령 직후의 변화량'</a:t>
+              <a:t>L3 판정 기준 — '촬영 구간 안의 지속된 변화'</a:t>
             </a:r>
             <a:endParaRPr lang="en-US" sz="3200" dirty="0"/>
           </a:p>
@@ -4767,7 +4767,7 @@
                 <a:ea typeface="맑은 고딕" pitchFamily="34" charset="-122"/>
                 <a:cs typeface="맑은 고딕" pitchFamily="34" charset="-120"/>
               </a:rPr>
-              <a:t>얼마나 밝은가가 아니라, 명령 직후 얼마나 변했는가를 봅니다</a:t>
+              <a:t>얼마나 밝은가가 아니라, 명령 뒤 얼마나 변했는가를 촬영 구간 전체에서 봅니다</a:t>
             </a:r>
             <a:endParaRPr lang="en-US" sz="1400" dirty="0"/>
           </a:p>
@@ -4871,7 +4871,7 @@
               <a:buNone/>
             </a:pPr>
             <a:r>
-              <a:rPr lang="en-US" sz="2000" dirty="0">
+              <a:rPr lang="en-US" sz="1900" dirty="0">
                 <a:solidFill>
                   <a:srgbClr val="1F2420"/>
                 </a:solidFill>
@@ -4879,13 +4879,13 @@
                 <a:ea typeface="맑은 고딕" pitchFamily="34" charset="-122"/>
                 <a:cs typeface="맑은 고딕" pitchFamily="34" charset="-120"/>
               </a:rPr>
-              <a:t>명령 직후 60초 안에  </a:t>
-            </a:r>
-            <a:pPr indent="0" marL="0">
-              <a:buNone/>
-            </a:pPr>
-            <a:r>
-              <a:rPr lang="en-US" sz="2000" b="1" dirty="0">
+              <a:t>촬영 구간(50초) 안에  </a:t>
+            </a:r>
+            <a:pPr indent="0" marL="0">
+              <a:buNone/>
+            </a:pPr>
+            <a:r>
+              <a:rPr lang="en-US" sz="1900" b="1" dirty="0">
                 <a:solidFill>
                   <a:srgbClr val="3A5035"/>
                 </a:solidFill>
@@ -4893,9 +4893,9 @@
                 <a:ea typeface="맑은 고딕" pitchFamily="34" charset="-122"/>
                 <a:cs typeface="맑은 고딕" pitchFamily="34" charset="-120"/>
               </a:rPr>
-              <a:t>상대값 변화 0.15 이상</a:t>
-            </a:r>
-            <a:endParaRPr lang="en-US" sz="2000" dirty="0"/>
+              <a:t>상대값 변화 0.15 이상, 3초 지속</a:t>
+            </a:r>
+            <a:endParaRPr lang="en-US" sz="1900" dirty="0"/>
           </a:p>
         </p:txBody>
       </p:sp>
@@ -4932,7 +4932,7 @@
                 <a:ea typeface="맑은 고딕" pitchFamily="34" charset="-122"/>
                 <a:cs typeface="맑은 고딕" pitchFamily="34" charset="-120"/>
               </a:rPr>
-              <a:t>마지막 3초 평균과 명령 전 값을 비교 · 실측된 조명 ON↔OFF 변화폭은 약 0.3 — 기준의 2배 여유</a:t>
+              <a:t>명령 전 값 대비, 구간 중 어느 시점이든 인정 · 순간 스파이크(사람 통과)는 3초 지속 조건으로 배제</a:t>
             </a:r>
             <a:endParaRPr lang="en-US" sz="1150" dirty="0"/>
           </a:p>
@@ -5215,7 +5215,7 @@
                 <a:ea typeface="맑은 고딕" pitchFamily="34" charset="-122"/>
                 <a:cs typeface="맑은 고딕" pitchFamily="34" charset="-120"/>
               </a:rPr>
-              <a:t>명령 직후 급변합니다 — 60초 안의 큰 변화는 가전의 반응</a:t>
+              <a:t>명령 직후 급변합니다 — 촬영 구간 안의 큰 변화는 가전의 반응</a:t>
             </a:r>
             <a:endParaRPr lang="en-US" sz="1100" dirty="0"/>
           </a:p>
@@ -5238,11 +5238,11 @@
             </a:avLst>
           </a:prstGeom>
           <a:solidFill>
-            <a:srgbClr val="F4F6F2"/>
+            <a:srgbClr val="FBF6EC"/>
           </a:solidFill>
           <a:ln w="12700">
             <a:solidFill>
-              <a:srgbClr val="E4E8E1"/>
+              <a:srgbClr val="A8803A"/>
             </a:solidFill>
             <a:prstDash val="solid"/>
           </a:ln>
@@ -5275,13 +5275,13 @@
             <a:r>
               <a:rPr lang="en-US" sz="1350" b="1" dirty="0">
                 <a:solidFill>
-                  <a:srgbClr val="3A5035"/>
-                </a:solidFill>
-                <a:latin typeface="맑은 고딕" pitchFamily="34" charset="0"/>
-                <a:ea typeface="맑은 고딕" pitchFamily="34" charset="-122"/>
-                <a:cs typeface="맑은 고딕" pitchFamily="34" charset="-120"/>
-              </a:rPr>
-              <a:t>이 기준의 성질</a:t>
+                  <a:srgbClr val="A8803A"/>
+                </a:solidFill>
+                <a:latin typeface="맑은 고딕" pitchFamily="34" charset="0"/>
+                <a:ea typeface="맑은 고딕" pitchFamily="34" charset="-122"/>
+                <a:cs typeface="맑은 고딕" pitchFamily="34" charset="-120"/>
+              </a:rPr>
+              <a:t>왜 끝값이 아니라 구간 전체인가</a:t>
             </a:r>
             <a:endParaRPr lang="en-US" sz="1350" dirty="0"/>
           </a:p>
@@ -5310,12 +5310,12 @@
           <a:p>
             <a:pPr indent="0" marL="0">
               <a:lnSpc>
-                <a:spcPts val="1800"/>
+                <a:spcPts val="1650"/>
               </a:lnSpc>
               <a:buNone/>
             </a:pPr>
             <a:r>
-              <a:rPr lang="en-US" sz="1150" dirty="0">
+              <a:rPr lang="en-US" sz="1100" dirty="0">
                 <a:solidFill>
                   <a:srgbClr val="1F2420"/>
                 </a:solidFill>
@@ -5323,19 +5323,19 @@
                 <a:ea typeface="맑은 고딕" pitchFamily="34" charset="-122"/>
                 <a:cs typeface="맑은 고딕" pitchFamily="34" charset="-120"/>
               </a:rPr>
-              <a:t>시각·날씨·커튼 상태와 무관하게</a:t>
-            </a:r>
-            <a:endParaRPr lang="en-US" sz="1150" dirty="0"/>
+              <a:t>복합 명령("다운라이트 켜고 커튼도</a:t>
+            </a:r>
+            <a:endParaRPr lang="en-US" sz="1100" dirty="0"/>
           </a:p>
           <a:p>
             <a:pPr indent="0" marL="0">
               <a:lnSpc>
-                <a:spcPts val="1800"/>
+                <a:spcPts val="1650"/>
               </a:lnSpc>
               <a:buNone/>
             </a:pPr>
             <a:r>
-              <a:rPr lang="en-US" sz="1150" dirty="0">
+              <a:rPr lang="en-US" sz="1100" dirty="0">
                 <a:solidFill>
                   <a:srgbClr val="1F2420"/>
                 </a:solidFill>
@@ -5343,19 +5343,19 @@
                 <a:ea typeface="맑은 고딕" pitchFamily="34" charset="-122"/>
                 <a:cs typeface="맑은 고딕" pitchFamily="34" charset="-120"/>
               </a:rPr>
-              <a:t>같은 기준이 성립합니다 — 아침</a:t>
-            </a:r>
-            <a:endParaRPr lang="en-US" sz="1150" dirty="0"/>
+              <a:t>열어줘")은 두 효과가 반대로 작용해</a:t>
+            </a:r>
+            <a:endParaRPr lang="en-US" sz="1100" dirty="0"/>
           </a:p>
           <a:p>
             <a:pPr indent="0" marL="0">
               <a:lnSpc>
-                <a:spcPts val="1800"/>
+                <a:spcPts val="1650"/>
               </a:lnSpc>
               <a:buNone/>
             </a:pPr>
             <a:r>
-              <a:rPr lang="en-US" sz="1150" dirty="0">
+              <a:rPr lang="en-US" sz="1100" dirty="0">
                 <a:solidFill>
                   <a:srgbClr val="1F2420"/>
                 </a:solidFill>
@@ -5363,19 +5363,19 @@
                 <a:ea typeface="맑은 고딕" pitchFamily="34" charset="-122"/>
                 <a:cs typeface="맑은 고딕" pitchFamily="34" charset="-120"/>
               </a:rPr>
-              <a:t>점검과 낮 시험에 다른 임계값이</a:t>
-            </a:r>
-            <a:endParaRPr lang="en-US" sz="1150" dirty="0"/>
+              <a:t>서로 상쇄됩니다 — 조명은 대상을</a:t>
+            </a:r>
+            <a:endParaRPr lang="en-US" sz="1100" dirty="0"/>
           </a:p>
           <a:p>
             <a:pPr indent="0" marL="0">
               <a:lnSpc>
-                <a:spcPts val="1800"/>
+                <a:spcPts val="1650"/>
               </a:lnSpc>
               <a:buNone/>
             </a:pPr>
             <a:r>
-              <a:rPr lang="en-US" sz="1150" dirty="0">
+              <a:rPr lang="en-US" sz="1100" dirty="0">
                 <a:solidFill>
                   <a:srgbClr val="1F2420"/>
                 </a:solidFill>
@@ -5383,28 +5383,48 @@
                 <a:ea typeface="맑은 고딕" pitchFamily="34" charset="-122"/>
                 <a:cs typeface="맑은 고딕" pitchFamily="34" charset="-120"/>
               </a:rPr>
-              <a:t>필요 없습니다.</a:t>
-            </a:r>
-            <a:endParaRPr lang="en-US" sz="1150" dirty="0"/>
+              <a:t>밝히고(↑), 커튼이 들인 채광은 참조</a:t>
+            </a:r>
+            <a:endParaRPr lang="en-US" sz="1100" dirty="0"/>
           </a:p>
           <a:p>
             <a:pPr indent="0" marL="0">
               <a:lnSpc>
-                <a:spcPts val="1800"/>
+                <a:spcPts val="1650"/>
               </a:lnSpc>
               <a:buNone/>
             </a:pPr>
-            <a:endParaRPr lang="en-US" sz="1150" dirty="0"/>
+            <a:r>
+              <a:rPr lang="en-US" sz="1100" dirty="0">
+                <a:solidFill>
+                  <a:srgbClr val="1F2420"/>
+                </a:solidFill>
+                <a:latin typeface="맑은 고딕" pitchFamily="34" charset="0"/>
+                <a:ea typeface="맑은 고딕" pitchFamily="34" charset="-122"/>
+                <a:cs typeface="맑은 고딕" pitchFamily="34" charset="-120"/>
+              </a:rPr>
+              <a:t>벽을 밝힙니다(↓).</a:t>
+            </a:r>
+            <a:endParaRPr lang="en-US" sz="1100" dirty="0"/>
           </a:p>
           <a:p>
             <a:pPr indent="0" marL="0">
               <a:lnSpc>
-                <a:spcPts val="1800"/>
+                <a:spcPts val="1650"/>
               </a:lnSpc>
               <a:buNone/>
             </a:pPr>
-            <a:r>
-              <a:rPr lang="en-US" sz="1150" dirty="0">
+            <a:endParaRPr lang="en-US" sz="1100" dirty="0"/>
+          </a:p>
+          <a:p>
+            <a:pPr indent="0" marL="0">
+              <a:lnSpc>
+                <a:spcPts val="1650"/>
+              </a:lnSpc>
+              <a:buNone/>
+            </a:pPr>
+            <a:r>
+              <a:rPr lang="en-US" sz="1100" dirty="0">
                 <a:solidFill>
                   <a:srgbClr val="1F2420"/>
                 </a:solidFill>
@@ -5412,19 +5432,19 @@
                 <a:ea typeface="맑은 고딕" pitchFamily="34" charset="-122"/>
                 <a:cs typeface="맑은 고딕" pitchFamily="34" charset="-120"/>
               </a:rPr>
-              <a:t>무인 점검에는 조명을 만질 사람이</a:t>
-            </a:r>
-            <a:endParaRPr lang="en-US" sz="1150" dirty="0"/>
+              <a:t>실측: 둘 다 정상 동작했는데</a:t>
+            </a:r>
+            <a:endParaRPr lang="en-US" sz="1100" dirty="0"/>
           </a:p>
           <a:p>
             <a:pPr indent="0" marL="0">
               <a:lnSpc>
-                <a:spcPts val="1800"/>
+                <a:spcPts val="1650"/>
               </a:lnSpc>
               <a:buNone/>
             </a:pPr>
             <a:r>
-              <a:rPr lang="en-US" sz="1150" dirty="0">
+              <a:rPr lang="en-US" sz="1100" dirty="0">
                 <a:solidFill>
                   <a:srgbClr val="1F2420"/>
                 </a:solidFill>
@@ -5432,19 +5452,19 @@
                 <a:ea typeface="맑은 고딕" pitchFamily="34" charset="-122"/>
                 <a:cs typeface="맑은 고딕" pitchFamily="34" charset="-120"/>
               </a:rPr>
-              <a:t>없으므로, 명령 직후의 급격한 변화</a:t>
-            </a:r>
-            <a:endParaRPr lang="en-US" sz="1150" dirty="0"/>
+              <a:t>촬영 종료 시점 순변화는 −0.10,</a:t>
+            </a:r>
+            <a:endParaRPr lang="en-US" sz="1100" dirty="0"/>
           </a:p>
           <a:p>
             <a:pPr indent="0" marL="0">
               <a:lnSpc>
-                <a:spcPts val="1800"/>
+                <a:spcPts val="1650"/>
               </a:lnSpc>
               <a:buNone/>
             </a:pPr>
             <a:r>
-              <a:rPr lang="en-US" sz="1150" dirty="0">
+              <a:rPr lang="en-US" sz="1100" dirty="0">
                 <a:solidFill>
                   <a:srgbClr val="1F2420"/>
                 </a:solidFill>
@@ -5452,28 +5472,28 @@
                 <a:ea typeface="맑은 고딕" pitchFamily="34" charset="-122"/>
                 <a:cs typeface="맑은 고딕" pitchFamily="34" charset="-120"/>
               </a:rPr>
-              <a:t>= 가전이 반응했다는 증거입니다.</a:t>
-            </a:r>
-            <a:endParaRPr lang="en-US" sz="1150" dirty="0"/>
+              <a:t>구간 최대 변위는 −0.201.</a:t>
+            </a:r>
+            <a:endParaRPr lang="en-US" sz="1100" dirty="0"/>
           </a:p>
           <a:p>
             <a:pPr indent="0" marL="0">
               <a:lnSpc>
-                <a:spcPts val="1800"/>
+                <a:spcPts val="1650"/>
               </a:lnSpc>
               <a:buNone/>
             </a:pPr>
-            <a:endParaRPr lang="en-US" sz="1150" dirty="0"/>
+            <a:endParaRPr lang="en-US" sz="1100" dirty="0"/>
           </a:p>
           <a:p>
             <a:pPr indent="0" marL="0">
               <a:lnSpc>
-                <a:spcPts val="1800"/>
+                <a:spcPts val="1650"/>
               </a:lnSpc>
               <a:buNone/>
             </a:pPr>
             <a:r>
-              <a:rPr lang="en-US" sz="1150" dirty="0">
+              <a:rPr lang="en-US" sz="1100" dirty="0">
                 <a:solidFill>
                   <a:srgbClr val="1F2420"/>
                 </a:solidFill>
@@ -5481,19 +5501,19 @@
                 <a:ea typeface="맑은 고딕" pitchFamily="34" charset="-122"/>
                 <a:cs typeface="맑은 고딕" pitchFamily="34" charset="-120"/>
               </a:rPr>
-              <a:t>변화가 시작되기까지의 시간은</a:t>
-            </a:r>
-            <a:endParaRPr lang="en-US" sz="1150" dirty="0"/>
+              <a:t>그래서 구간 중 어느 시점의 지속된</a:t>
+            </a:r>
+            <a:endParaRPr lang="en-US" sz="1100" dirty="0"/>
           </a:p>
           <a:p>
             <a:pPr indent="0" marL="0">
               <a:lnSpc>
-                <a:spcPts val="1800"/>
+                <a:spcPts val="1650"/>
               </a:lnSpc>
               <a:buNone/>
             </a:pPr>
             <a:r>
-              <a:rPr lang="en-US" sz="1150" dirty="0">
+              <a:rPr lang="en-US" sz="1100" dirty="0">
                 <a:solidFill>
                   <a:srgbClr val="1F2420"/>
                 </a:solidFill>
@@ -5501,19 +5521,19 @@
                 <a:ea typeface="맑은 고딕" pitchFamily="34" charset="-122"/>
                 <a:cs typeface="맑은 고딕" pitchFamily="34" charset="-120"/>
               </a:rPr>
-              <a:t>가전 반응 시간으로 함께 기록됩니다</a:t>
-            </a:r>
-            <a:endParaRPr lang="en-US" sz="1150" dirty="0"/>
+              <a:t>변화든 인정하며, 판정에 쓴 측정</a:t>
+            </a:r>
+            <a:endParaRPr lang="en-US" sz="1100" dirty="0"/>
           </a:p>
           <a:p>
             <a:pPr indent="0" marL="0">
               <a:lnSpc>
-                <a:spcPts val="1800"/>
+                <a:spcPts val="1650"/>
               </a:lnSpc>
               <a:buNone/>
             </a:pPr>
             <a:r>
-              <a:rPr lang="en-US" sz="1150" dirty="0">
+              <a:rPr lang="en-US" sz="1100" dirty="0">
                 <a:solidFill>
                   <a:srgbClr val="1F2420"/>
                 </a:solidFill>
@@ -5521,9 +5541,9 @@
                 <a:ea typeface="맑은 고딕" pitchFamily="34" charset="-122"/>
                 <a:cs typeface="맑은 고딕" pitchFamily="34" charset="-120"/>
               </a:rPr>
-              <a:t>(응답 시작의 물리 동작판 지표).</a:t>
-            </a:r>
-            <a:endParaRPr lang="en-US" sz="1150" dirty="0"/>
+              <a:t>시계열 전체가 기록으로 남습니다.</a:t>
+            </a:r>
+            <a:endParaRPr lang="en-US" sz="1100" dirty="0"/>
           </a:p>
         </p:txBody>
       </p:sp>
@@ -5579,7 +5599,7 @@
               <a:buNone/>
             </a:pPr>
             <a:r>
-              <a:rPr lang="en-US" sz="1300" b="1" dirty="0">
+              <a:rPr lang="en-US" sz="1250" b="1" dirty="0">
                 <a:solidFill>
                   <a:srgbClr val="3A5035"/>
                 </a:solidFill>
@@ -5593,7 +5613,7 @@
               <a:buNone/>
             </a:pPr>
             <a:r>
-              <a:rPr lang="en-US" sz="1300" dirty="0">
+              <a:rPr lang="en-US" sz="1250" dirty="0">
                 <a:solidFill>
                   <a:srgbClr val="1F2420"/>
                 </a:solidFill>
@@ -5601,9 +5621,9 @@
                 <a:ea typeface="맑은 고딕" pitchFamily="34" charset="-122"/>
                 <a:cs typeface="맑은 고딕" pitchFamily="34" charset="-120"/>
               </a:rPr>
-              <a:t>같은 입력에는 항상 같은 결과 — 검증·설명·재현이 가능한 결정적 판정입니다.</a:t>
-            </a:r>
-            <a:endParaRPr lang="en-US" sz="1300" dirty="0"/>
+              <a:t>같은 입력에는 항상 같은 결과 — 검증·설명·재현이 가능한 결정적 판정입니다. 시각·날씨·커튼 상태와 무관하게 같은 기준이 성립하고, 변화 시작까지의 시간은 가전 반응 시간으로 기록됩니다.</a:t>
+            </a:r>
+            <a:endParaRPr lang="en-US" sz="1250" dirty="0"/>
           </a:p>
         </p:txBody>
       </p:sp>
@@ -6108,7 +6128,24 @@
                 <a:ea typeface="맑은 고딕" pitchFamily="34" charset="-122"/>
                 <a:cs typeface="맑은 고딕" pitchFamily="34" charset="-120"/>
               </a:rPr>
-              <a:t>"조명 켜줘"</a:t>
+              <a:t>"다운라이트 켜고,</a:t>
+            </a:r>
+            <a:endParaRPr lang="en-US" sz="950" dirty="0"/>
+          </a:p>
+          <a:p>
+            <a:pPr algn="ctr" indent="0" marL="0">
+              <a:buNone/>
+            </a:pPr>
+            <a:r>
+              <a:rPr lang="en-US" sz="950" dirty="0">
+                <a:solidFill>
+                  <a:srgbClr val="6E786B"/>
+                </a:solidFill>
+                <a:latin typeface="맑은 고딕" pitchFamily="34" charset="0"/>
+                <a:ea typeface="맑은 고딕" pitchFamily="34" charset="-122"/>
+                <a:cs typeface="맑은 고딕" pitchFamily="34" charset="-120"/>
+              </a:rPr>
+              <a:t>커튼도 열어줘"</a:t>
             </a:r>
             <a:endParaRPr lang="en-US" sz="950" dirty="0"/>
           </a:p>
@@ -6723,7 +6760,7 @@
                 <a:ea typeface="맑은 고딕" pitchFamily="34" charset="-122"/>
                 <a:cs typeface="맑은 고딕" pitchFamily="34" charset="-120"/>
               </a:rPr>
-              <a:t>60초 연속 촬영</a:t>
+              <a:t>50초 연속 촬영</a:t>
             </a:r>
             <a:endParaRPr lang="en-US" sz="1150" dirty="0"/>
           </a:p>
@@ -6941,7 +6978,7 @@
                 <a:ea typeface="맑은 고딕" pitchFamily="34" charset="-122"/>
                 <a:cs typeface="맑은 고딕" pitchFamily="34" charset="-120"/>
               </a:rPr>
-              <a:t>|Δ| 판정 → 전송</a:t>
+              <a:t>구간 변위 판정</a:t>
             </a:r>
             <a:endParaRPr lang="en-US" sz="1150" dirty="0"/>
           </a:p>
@@ -6980,7 +7017,7 @@
                 <a:ea typeface="맑은 고딕" pitchFamily="34" charset="-122"/>
                 <a:cs typeface="맑은 고딕" pitchFamily="34" charset="-120"/>
               </a:rPr>
-              <a:t>반응 시간 기록</a:t>
+              <a:t>반응 시간 기록·전송</a:t>
             </a:r>
             <a:endParaRPr lang="en-US" sz="950" dirty="0"/>
           </a:p>
@@ -7365,7 +7402,7 @@
         <p:spPr>
           <a:xfrm>
             <a:off x="6446520" y="4059936"/>
-            <a:ext cx="4846320" cy="1920240"/>
+            <a:ext cx="4846320" cy="2011680"/>
           </a:xfrm>
           <a:prstGeom prst="rect">
             <a:avLst/>
@@ -7379,12 +7416,12 @@
           <a:p>
             <a:pPr indent="0" marL="0">
               <a:lnSpc>
-                <a:spcPts val="1800"/>
+                <a:spcPts val="1600"/>
               </a:lnSpc>
               <a:buNone/>
             </a:pPr>
             <a:r>
-              <a:rPr lang="en-US" sz="1150" dirty="0">
+              <a:rPr lang="en-US" sz="1100" dirty="0">
                 <a:solidFill>
                   <a:srgbClr val="1F2420"/>
                 </a:solidFill>
@@ -7392,19 +7429,19 @@
                 <a:ea typeface="맑은 고딕" pitchFamily="34" charset="-122"/>
                 <a:cs typeface="맑은 고딕" pitchFamily="34" charset="-120"/>
               </a:rPr>
-              <a:t>응답 녹음 · 확답 이후 녹음 · 판정 시점 스냅샷을 전부</a:t>
-            </a:r>
-            <a:endParaRPr lang="en-US" sz="1150" dirty="0"/>
+              <a:t>장비가 스스로 소리 내지 않는 모든 구간을 녹음합니다 —</a:t>
+            </a:r>
+            <a:endParaRPr lang="en-US" sz="1100" dirty="0"/>
           </a:p>
           <a:p>
             <a:pPr indent="0" marL="0">
               <a:lnSpc>
-                <a:spcPts val="1800"/>
+                <a:spcPts val="1600"/>
               </a:lnSpc>
               <a:buNone/>
             </a:pPr>
             <a:r>
-              <a:rPr lang="en-US" sz="1150" dirty="0">
+              <a:rPr lang="en-US" sz="1100" dirty="0">
                 <a:solidFill>
                   <a:srgbClr val="1F2420"/>
                 </a:solidFill>
@@ -7412,28 +7449,39 @@
                 <a:ea typeface="맑은 고딕" pitchFamily="34" charset="-122"/>
                 <a:cs typeface="맑은 고딕" pitchFamily="34" charset="-120"/>
               </a:rPr>
-              <a:t>저장합니다.</a:t>
-            </a:r>
-            <a:endParaRPr lang="en-US" sz="1150" dirty="0"/>
+              <a:t>응답 녹음 · 확답 대기~촬영 녹음 · 판정 시점 스냅샷 ·</a:t>
+            </a:r>
+            <a:endParaRPr lang="en-US" sz="1100" dirty="0"/>
           </a:p>
           <a:p>
             <a:pPr indent="0" marL="0">
               <a:lnSpc>
-                <a:spcPts val="1800"/>
+                <a:spcPts val="1600"/>
               </a:lnSpc>
               <a:buNone/>
             </a:pPr>
-            <a:endParaRPr lang="en-US" sz="1150" dirty="0"/>
+            <a:r>
+              <a:rPr lang="en-US" sz="1100" dirty="0">
+                <a:solidFill>
+                  <a:srgbClr val="1F2420"/>
+                </a:solidFill>
+                <a:latin typeface="맑은 고딕" pitchFamily="34" charset="0"/>
+                <a:ea typeface="맑은 고딕" pitchFamily="34" charset="-122"/>
+                <a:cs typeface="맑은 고딕" pitchFamily="34" charset="-120"/>
+              </a:rPr>
+              <a:t>측정 시계열 전부 저장. (복합 명령은 연산이 길어 실행</a:t>
+            </a:r>
+            <a:endParaRPr lang="en-US" sz="1100" dirty="0"/>
           </a:p>
           <a:p>
             <a:pPr indent="0" marL="0">
               <a:lnSpc>
-                <a:spcPts val="1800"/>
+                <a:spcPts val="1600"/>
               </a:lnSpc>
               <a:buNone/>
             </a:pPr>
             <a:r>
-              <a:rPr lang="en-US" sz="1150" dirty="0">
+              <a:rPr lang="en-US" sz="1100" dirty="0">
                 <a:solidFill>
                   <a:srgbClr val="1F2420"/>
                 </a:solidFill>
@@ -7441,19 +7489,19 @@
                 <a:ea typeface="맑은 고딕" pitchFamily="34" charset="-122"/>
                 <a:cs typeface="맑은 고딕" pitchFamily="34" charset="-120"/>
               </a:rPr>
-              <a:t>판정 결과에 의문이 생기면 언제든 원본을 다시 듣고 볼 수</a:t>
-            </a:r>
-            <a:endParaRPr lang="en-US" sz="1150" dirty="0"/>
+              <a:t>선언이 첫 청취 창 밖에 나올 수 있어, 이 녹음이 응답·내용</a:t>
+            </a:r>
+            <a:endParaRPr lang="en-US" sz="1100" dirty="0"/>
           </a:p>
           <a:p>
             <a:pPr indent="0" marL="0">
               <a:lnSpc>
-                <a:spcPts val="1800"/>
+                <a:spcPts val="1600"/>
               </a:lnSpc>
               <a:buNone/>
             </a:pPr>
             <a:r>
-              <a:rPr lang="en-US" sz="1150" dirty="0">
+              <a:rPr lang="en-US" sz="1100" dirty="0">
                 <a:solidFill>
                   <a:srgbClr val="1F2420"/>
                 </a:solidFill>
@@ -7461,19 +7509,28 @@
                 <a:ea typeface="맑은 고딕" pitchFamily="34" charset="-122"/>
                 <a:cs typeface="맑은 고딕" pitchFamily="34" charset="-120"/>
               </a:rPr>
-              <a:t>있어, 실패 원인 추적과 판정 신뢰성 확인이 가능합니다.</a:t>
-            </a:r>
-            <a:endParaRPr lang="en-US" sz="1150" dirty="0"/>
+              <a:t>판정의 근거가 됩니다.)</a:t>
+            </a:r>
+            <a:endParaRPr lang="en-US" sz="1100" dirty="0"/>
           </a:p>
           <a:p>
             <a:pPr indent="0" marL="0">
               <a:lnSpc>
-                <a:spcPts val="1800"/>
+                <a:spcPts val="1600"/>
               </a:lnSpc>
               <a:buNone/>
             </a:pPr>
-            <a:r>
-              <a:rPr lang="en-US" sz="1150" dirty="0">
+            <a:endParaRPr lang="en-US" sz="1100" dirty="0"/>
+          </a:p>
+          <a:p>
+            <a:pPr indent="0" marL="0">
+              <a:lnSpc>
+                <a:spcPts val="1600"/>
+              </a:lnSpc>
+              <a:buNone/>
+            </a:pPr>
+            <a:r>
+              <a:rPr lang="en-US" sz="1100" dirty="0">
                 <a:solidFill>
                   <a:srgbClr val="1F2420"/>
                 </a:solidFill>
@@ -7481,19 +7538,19 @@
                 <a:ea typeface="맑은 고딕" pitchFamily="34" charset="-122"/>
                 <a:cs typeface="맑은 고딕" pitchFamily="34" charset="-120"/>
               </a:rPr>
-              <a:t>L2의 인식 문장 기록과 함께, 모든 판정이 "왜 그렇게</a:t>
-            </a:r>
-            <a:endParaRPr lang="en-US" sz="1150" dirty="0"/>
+              <a:t>판정에 의문이 생기면 언제든 원본을 다시 듣고 볼 수 있어</a:t>
+            </a:r>
+            <a:endParaRPr lang="en-US" sz="1100" dirty="0"/>
           </a:p>
           <a:p>
             <a:pPr indent="0" marL="0">
               <a:lnSpc>
-                <a:spcPts val="1800"/>
+                <a:spcPts val="1600"/>
               </a:lnSpc>
               <a:buNone/>
             </a:pPr>
             <a:r>
-              <a:rPr lang="en-US" sz="1150" dirty="0">
+              <a:rPr lang="en-US" sz="1100" dirty="0">
                 <a:solidFill>
                   <a:srgbClr val="1F2420"/>
                 </a:solidFill>
@@ -7501,9 +7558,29 @@
                 <a:ea typeface="맑은 고딕" pitchFamily="34" charset="-122"/>
                 <a:cs typeface="맑은 고딕" pitchFamily="34" charset="-120"/>
               </a:rPr>
-              <a:t>판정했는지"를 증거로 설명할 수 있는 구조입니다.</a:t>
-            </a:r>
-            <a:endParaRPr lang="en-US" sz="1150" dirty="0"/>
+              <a:t>— 실제로 현장 검증의 실패 3건을 원본으로 당일 판독했고,</a:t>
+            </a:r>
+            <a:endParaRPr lang="en-US" sz="1100" dirty="0"/>
+          </a:p>
+          <a:p>
+            <a:pPr indent="0" marL="0">
+              <a:lnSpc>
+                <a:spcPts val="1600"/>
+              </a:lnSpc>
+              <a:buNone/>
+            </a:pPr>
+            <a:r>
+              <a:rPr lang="en-US" sz="1100" dirty="0">
+                <a:solidFill>
+                  <a:srgbClr val="1F2420"/>
+                </a:solidFill>
+                <a:latin typeface="맑은 고딕" pitchFamily="34" charset="0"/>
+                <a:ea typeface="맑은 고딕" pitchFamily="34" charset="-122"/>
+                <a:cs typeface="맑은 고딕" pitchFamily="34" charset="-120"/>
+              </a:rPr>
+              <a:t>모든 판정이 "왜"를 증거로 설명할 수 있는 구조입니다.</a:t>
+            </a:r>
+            <a:endParaRPr lang="en-US" sz="1100" dirty="0"/>
           </a:p>
         </p:txBody>
       </p:sp>
@@ -12769,7 +12846,7 @@
                 <a:ea typeface="맑은 고딕" pitchFamily="34" charset="-122"/>
                 <a:cs typeface="맑은 고딕" pitchFamily="34" charset="-120"/>
               </a:rPr>
-              <a:t>L1·L2 실패</a:t>
+              <a:t>실패</a:t>
             </a:r>
             <a:endParaRPr lang="en-US" sz="1300" dirty="0"/>
           </a:p>
@@ -12808,7 +12885,7 @@
                 <a:ea typeface="맑은 고딕" pitchFamily="34" charset="-122"/>
                 <a:cs typeface="맑은 고딕" pitchFamily="34" charset="-120"/>
               </a:rPr>
-              <a:t>전 시나리오 통과</a:t>
+              <a:t>L1·L2·L3 전 단계 통과</a:t>
             </a:r>
             <a:endParaRPr lang="en-US" sz="1100" dirty="0"/>
           </a:p>
@@ -12874,7 +12951,7 @@
                 <a:ea typeface="맑은 고딕" pitchFamily="34" charset="-122"/>
                 <a:cs typeface="맑은 고딕" pitchFamily="34" charset="-120"/>
               </a:rPr>
-              <a:t>0.317</a:t>
+              <a:t>0.613</a:t>
             </a:r>
             <a:endParaRPr lang="en-US" sz="2800" dirty="0"/>
           </a:p>
@@ -12913,7 +12990,7 @@
                 <a:ea typeface="맑은 고딕" pitchFamily="34" charset="-122"/>
                 <a:cs typeface="맑은 고딕" pitchFamily="34" charset="-120"/>
               </a:rPr>
-              <a:t>L3 실측 |Δ|</a:t>
+              <a:t>L3 최대 실측 |Δ|</a:t>
             </a:r>
             <a:endParaRPr lang="en-US" sz="1300" dirty="0"/>
           </a:p>
@@ -12952,7 +13029,7 @@
                 <a:ea typeface="맑은 고딕" pitchFamily="34" charset="-122"/>
                 <a:cs typeface="맑은 고딕" pitchFamily="34" charset="-120"/>
               </a:rPr>
-              <a:t>기준 0.15의 2배 여유</a:t>
+              <a:t>기준 0.15의 4배 여유</a:t>
             </a:r>
             <a:endParaRPr lang="en-US" sz="1100" dirty="0"/>
           </a:p>
@@ -13018,7 +13095,7 @@
                 <a:ea typeface="맑은 고딕" pitchFamily="34" charset="-122"/>
                 <a:cs typeface="맑은 고딕" pitchFamily="34" charset="-120"/>
               </a:rPr>
-              <a:t>26건</a:t>
+              <a:t>29건</a:t>
             </a:r>
             <a:endParaRPr lang="en-US" sz="2800" dirty="0"/>
           </a:p>
@@ -14104,7 +14181,7 @@
                 <a:ea typeface="맑은 고딕" pitchFamily="34" charset="-122"/>
                 <a:cs typeface="맑은 고딕" pitchFamily="34" charset="-120"/>
               </a:rPr>
-              <a:t>조명 제어 (L3)</a:t>
+              <a:t>가전 제어 (L3)</a:t>
             </a:r>
             <a:endParaRPr lang="en-US" sz="1200" dirty="0"/>
           </a:p>
@@ -14143,7 +14220,7 @@
                 <a:ea typeface="맑은 고딕" pitchFamily="34" charset="-122"/>
                 <a:cs typeface="맑은 고딕" pitchFamily="34" charset="-120"/>
               </a:rPr>
-              <a:t>음성 명령 → 물리 동작</a:t>
+              <a:t>복합 명령(다중 의도) + 루틴 일괄 제어</a:t>
             </a:r>
             <a:endParaRPr lang="en-US" sz="1100" dirty="0"/>
           </a:p>
@@ -14221,7 +14298,7 @@
                 <a:ea typeface="맑은 고딕" pitchFamily="34" charset="-122"/>
                 <a:cs typeface="맑은 고딕" pitchFamily="34" charset="-120"/>
               </a:rPr>
-              <a:t>상대값 0.746 ↔ 1.063 (|Δ| 0.317)</a:t>
+              <a:t>최대 변위 |Δ| 0.201(켜기) · 0.613(외출 복구)</a:t>
             </a:r>
             <a:endParaRPr lang="en-US" sz="1050" dirty="0"/>
           </a:p>
